--- a/docs/presentation.pptx
+++ b/docs/presentation.pptx
@@ -13522,51 +13522,7 @@
       </p:sp>
       <p:sp>
         <p:nvSpPr>
-          <p:cNvPr id="17" name="Right Arrow 16"/>
-          <p:cNvSpPr/>
-          <p:nvPr/>
-        </p:nvSpPr>
-        <p:spPr>
-          <a:xfrm>
-            <a:off x="6675120" y="4023360"/>
-            <a:ext cx="-1188720" cy="365760"/>
-          </a:xfrm>
-          <a:prstGeom prst="rightArrow">
-            <a:avLst/>
-          </a:prstGeom>
-          <a:solidFill>
-            <a:srgbClr val="FBBF24"/>
-          </a:solidFill>
-          <a:ln>
-            <a:noFill/>
-          </a:ln>
-          <a:effectLst/>
-        </p:spPr>
-        <p:style>
-          <a:lnRef idx="1">
-            <a:schemeClr val="accent1"/>
-          </a:lnRef>
-          <a:fillRef idx="3">
-            <a:schemeClr val="accent1"/>
-          </a:fillRef>
-          <a:effectRef idx="2">
-            <a:schemeClr val="accent1"/>
-          </a:effectRef>
-          <a:fontRef idx="minor">
-            <a:schemeClr val="lt1"/>
-          </a:fontRef>
-        </p:style>
-        <p:txBody>
-          <a:bodyPr rtlCol="0" anchor="ctr"/>
-          <a:lstStyle/>
-          <a:p>
-            <a:pPr algn="ctr"/>
-          </a:p>
-        </p:txBody>
-      </p:sp>
-      <p:sp>
-        <p:nvSpPr>
-          <p:cNvPr id="18" name="TextBox 17"/>
+          <p:cNvPr id="17" name="TextBox 16"/>
           <p:cNvSpPr txBox="1"/>
           <p:nvPr/>
         </p:nvSpPr>
@@ -13601,7 +13557,7 @@
       </p:sp>
       <p:sp>
         <p:nvSpPr>
-          <p:cNvPr id="19" name="Rectangle 18"/>
+          <p:cNvPr id="18" name="Rectangle 17"/>
           <p:cNvSpPr/>
           <p:nvPr/>
         </p:nvSpPr>
@@ -13647,7 +13603,7 @@
       </p:sp>
       <p:sp>
         <p:nvSpPr>
-          <p:cNvPr id="20" name="Rectangle 19"/>
+          <p:cNvPr id="19" name="Rectangle 18"/>
           <p:cNvSpPr/>
           <p:nvPr/>
         </p:nvSpPr>
@@ -13691,7 +13647,7 @@
       </p:sp>
       <p:sp>
         <p:nvSpPr>
-          <p:cNvPr id="21" name="TextBox 20"/>
+          <p:cNvPr id="20" name="TextBox 19"/>
           <p:cNvSpPr txBox="1"/>
           <p:nvPr/>
         </p:nvSpPr>
@@ -13726,7 +13682,7 @@
       </p:sp>
       <p:sp>
         <p:nvSpPr>
-          <p:cNvPr id="22" name="TextBox 21"/>
+          <p:cNvPr id="21" name="TextBox 20"/>
           <p:cNvSpPr txBox="1"/>
           <p:nvPr/>
         </p:nvSpPr>
@@ -13835,7 +13791,7 @@
       </p:sp>
       <p:sp>
         <p:nvSpPr>
-          <p:cNvPr id="23" name="Rectangle 22"/>
+          <p:cNvPr id="22" name="Rectangle 21"/>
           <p:cNvSpPr/>
           <p:nvPr/>
         </p:nvSpPr>
@@ -13881,7 +13837,7 @@
       </p:sp>
       <p:sp>
         <p:nvSpPr>
-          <p:cNvPr id="24" name="Rectangle 23"/>
+          <p:cNvPr id="23" name="Rectangle 22"/>
           <p:cNvSpPr/>
           <p:nvPr/>
         </p:nvSpPr>
@@ -13925,7 +13881,7 @@
       </p:sp>
       <p:sp>
         <p:nvSpPr>
-          <p:cNvPr id="25" name="TextBox 24"/>
+          <p:cNvPr id="24" name="TextBox 23"/>
           <p:cNvSpPr txBox="1"/>
           <p:nvPr/>
         </p:nvSpPr>
@@ -13960,7 +13916,7 @@
       </p:sp>
       <p:sp>
         <p:nvSpPr>
-          <p:cNvPr id="26" name="TextBox 25"/>
+          <p:cNvPr id="25" name="TextBox 24"/>
           <p:cNvSpPr txBox="1"/>
           <p:nvPr/>
         </p:nvSpPr>
@@ -14105,7 +14061,7 @@
       </p:sp>
       <p:sp>
         <p:nvSpPr>
-          <p:cNvPr id="27" name="TextBox 26"/>
+          <p:cNvPr id="26" name="TextBox 25"/>
           <p:cNvSpPr txBox="1"/>
           <p:nvPr/>
         </p:nvSpPr>
@@ -14140,7 +14096,7 @@
       </p:sp>
       <p:sp>
         <p:nvSpPr>
-          <p:cNvPr id="28" name="TextBox 27"/>
+          <p:cNvPr id="27" name="TextBox 26"/>
           <p:cNvSpPr txBox="1"/>
           <p:nvPr/>
         </p:nvSpPr>
